--- a/assets/figures/concepts/concept_diagrams_editable.pptx
+++ b/assets/figures/concepts/concept_diagrams_editable.pptx
@@ -3665,7 +3665,7 @@
                 <a:latin typeface="Yu Gothic"/>
               </a:rPr>
               <a:t>特徴波長
-模様間隔 λ</a:t>
+模様の代表的な間隔</a:t>
             </a:r>
           </a:p>
         </p:txBody>
@@ -4565,7 +4565,7 @@
                 <a:latin typeface="Yu Gothic"/>
               </a:rPr>
               <a:t>seedだけ変える
-seed 1 → T₁，…，seed n → Tₙ</a:t>
+複数のseedで独立に実行する</a:t>
             </a:r>
           </a:p>
         </p:txBody>
@@ -4702,6 +4702,158 @@
               </a:rPr>
               <a:t>基準条件と代替条件には同じseed集合を使い，偶然差をそろえる．</a:t>
             </a:r>
+          </a:p>
+        </p:txBody>
+      </p:sp>
+      <p:sp>
+        <p:nvSpPr>
+          <p:cNvPr id="10" name="TextBox 9"/>
+          <p:cNvSpPr txBox="1"/>
+          <p:nvPr/>
+        </p:nvSpPr>
+        <p:spPr>
+          <a:xfrm>
+            <a:off x="4069080" y="4069080"/>
+            <a:ext cx="4114800" cy="457200"/>
+          </a:xfrm>
+          <a:prstGeom prst="rect">
+            <a:avLst/>
+          </a:prstGeom>
+          <a:noFill/>
+        </p:spPr>
+        <p:txBody>
+          <a:bodyPr wrap="none" lIns="0" rIns="0" tIns="0" bIns="0" anchor="ctr">
+            <a:spAutoFit/>
+          </a:bodyPr>
+          <a:lstStyle/>
+          <a:p>
+            <a:pPr algn="ctr">
+              <a:defRPr sz="1700" lang="ja-JP"/>
+            </a:pPr>
+            <a14:m xmlns:a14="http://schemas.microsoft.com/office/drawing/2010/main">
+              <m:oMathPara xmlns:m="http://schemas.openxmlformats.org/officeDocument/2006/math">
+                <m:oMathParaPr>
+                  <m:jc m:val="center"/>
+                </m:oMathParaPr>
+                <m:oMath>
+                  <m:r>
+                    <m:rPr>
+                      <m:sty m:val="p"/>
+                    </m:rPr>
+                    <m:t>s</m:t>
+                  </m:r>
+                  <m:r>
+                    <m:rPr>
+                      <m:sty m:val="p"/>
+                    </m:rPr>
+                    <m:t>e</m:t>
+                  </m:r>
+                  <m:r>
+                    <m:rPr>
+                      <m:sty m:val="p"/>
+                    </m:rPr>
+                    <m:t>e</m:t>
+                  </m:r>
+                  <m:r>
+                    <m:rPr>
+                      <m:sty m:val="p"/>
+                    </m:rPr>
+                    <m:t>d</m:t>
+                  </m:r>
+                  <m:r>
+                    <m:t> </m:t>
+                  </m:r>
+                  <m:r>
+                    <m:t>1</m:t>
+                  </m:r>
+                  <m:r>
+                    <m:rPr>
+                      <m:sty m:val="p"/>
+                    </m:rPr>
+                    <m:t>↦</m:t>
+                  </m:r>
+                  <m:sSub>
+                    <m:e>
+                      <m:r>
+                        <m:t>T</m:t>
+                      </m:r>
+                    </m:e>
+                    <m:sub>
+                      <m:r>
+                        <m:t>1</m:t>
+                      </m:r>
+                    </m:sub>
+                  </m:sSub>
+                  <m:r>
+                    <m:rPr>
+                      <m:sty m:val="p"/>
+                    </m:rPr>
+                    <m:t>,</m:t>
+                  </m:r>
+                  <m:r>
+                    <m:rPr>
+                      <m:sty m:val="p"/>
+                    </m:rPr>
+                    <m:t>…</m:t>
+                  </m:r>
+                  <m:r>
+                    <m:rPr>
+                      <m:sty m:val="p"/>
+                    </m:rPr>
+                    <m:t>,</m:t>
+                  </m:r>
+                  <m:r>
+                    <m:rPr>
+                      <m:sty m:val="p"/>
+                    </m:rPr>
+                    <m:t>s</m:t>
+                  </m:r>
+                  <m:r>
+                    <m:rPr>
+                      <m:sty m:val="p"/>
+                    </m:rPr>
+                    <m:t>e</m:t>
+                  </m:r>
+                  <m:r>
+                    <m:rPr>
+                      <m:sty m:val="p"/>
+                    </m:rPr>
+                    <m:t>e</m:t>
+                  </m:r>
+                  <m:r>
+                    <m:rPr>
+                      <m:sty m:val="p"/>
+                    </m:rPr>
+                    <m:t>d</m:t>
+                  </m:r>
+                  <m:r>
+                    <m:t> </m:t>
+                  </m:r>
+                  <m:r>
+                    <m:t>n</m:t>
+                  </m:r>
+                  <m:r>
+                    <m:rPr>
+                      <m:sty m:val="p"/>
+                    </m:rPr>
+                    <m:t>↦</m:t>
+                  </m:r>
+                  <m:sSub>
+                    <m:e>
+                      <m:r>
+                        <m:t>T</m:t>
+                      </m:r>
+                    </m:e>
+                    <m:sub>
+                      <m:r>
+                        <m:t>n</m:t>
+                      </m:r>
+                    </m:sub>
+                  </m:sSub>
+                </m:oMath>
+              </m:oMathPara>
+            </a14:m>
+            <a:endParaRPr sz="1700" lang="ja-JP"/>
           </a:p>
         </p:txBody>
       </p:sp>
@@ -4850,14 +5002,70 @@
                 </a:solidFill>
                 <a:latin typeface="Yu Gothic"/>
               </a:rPr>
-              <a:t>R(t)</a:t>
-            </a:r>
-          </a:p>
-        </p:txBody>
-      </p:sp>
-      <p:sp>
-        <p:nvSpPr>
-          <p:cNvPr id="5" name="Oval 4"/>
+              <a:t/>
+            </a:r>
+          </a:p>
+        </p:txBody>
+      </p:sp>
+      <p:sp>
+        <p:nvSpPr>
+          <p:cNvPr id="5" name="TextBox 4"/>
+          <p:cNvSpPr txBox="1"/>
+          <p:nvPr/>
+        </p:nvSpPr>
+        <p:spPr>
+          <a:xfrm>
+            <a:off x="1417320" y="2286000"/>
+            <a:ext cx="822960" cy="457200"/>
+          </a:xfrm>
+          <a:prstGeom prst="rect">
+            <a:avLst/>
+          </a:prstGeom>
+          <a:noFill/>
+        </p:spPr>
+        <p:txBody>
+          <a:bodyPr wrap="none" lIns="0" rIns="0" tIns="0" bIns="0" anchor="ctr">
+            <a:spAutoFit/>
+          </a:bodyPr>
+          <a:lstStyle/>
+          <a:p>
+            <a:pPr algn="ctr">
+              <a:defRPr sz="1900" lang="ja-JP"/>
+            </a:pPr>
+            <a14:m xmlns:a14="http://schemas.microsoft.com/office/drawing/2010/main">
+              <m:oMathPara xmlns:m="http://schemas.openxmlformats.org/officeDocument/2006/math">
+                <m:oMathParaPr>
+                  <m:jc m:val="center"/>
+                </m:oMathParaPr>
+                <m:oMath>
+                  <m:r>
+                    <m:t>R</m:t>
+                  </m:r>
+                  <m:r>
+                    <m:rPr>
+                      <m:sty m:val="p"/>
+                    </m:rPr>
+                    <m:t>(</m:t>
+                  </m:r>
+                  <m:r>
+                    <m:t>t</m:t>
+                  </m:r>
+                  <m:r>
+                    <m:rPr>
+                      <m:sty m:val="p"/>
+                    </m:rPr>
+                    <m:t>)</m:t>
+                  </m:r>
+                </m:oMath>
+              </m:oMathPara>
+            </a14:m>
+            <a:endParaRPr sz="1900" lang="ja-JP"/>
+          </a:p>
+        </p:txBody>
+      </p:sp>
+      <p:sp>
+        <p:nvSpPr>
+          <p:cNvPr id="6" name="Oval 5"/>
           <p:cNvSpPr/>
           <p:nvPr/>
         </p:nvSpPr>
@@ -4904,14 +5112,70 @@
                 </a:solidFill>
                 <a:latin typeface="Yu Gothic"/>
               </a:rPr>
-              <a:t>J(t)</a:t>
-            </a:r>
-          </a:p>
-        </p:txBody>
-      </p:sp>
-      <p:sp>
-        <p:nvSpPr>
-          <p:cNvPr id="6" name="Right Arrow 5"/>
+              <a:t/>
+            </a:r>
+          </a:p>
+        </p:txBody>
+      </p:sp>
+      <p:sp>
+        <p:nvSpPr>
+          <p:cNvPr id="7" name="TextBox 6"/>
+          <p:cNvSpPr txBox="1"/>
+          <p:nvPr/>
+        </p:nvSpPr>
+        <p:spPr>
+          <a:xfrm>
+            <a:off x="4160520" y="2286000"/>
+            <a:ext cx="822960" cy="457200"/>
+          </a:xfrm>
+          <a:prstGeom prst="rect">
+            <a:avLst/>
+          </a:prstGeom>
+          <a:noFill/>
+        </p:spPr>
+        <p:txBody>
+          <a:bodyPr wrap="none" lIns="0" rIns="0" tIns="0" bIns="0" anchor="ctr">
+            <a:spAutoFit/>
+          </a:bodyPr>
+          <a:lstStyle/>
+          <a:p>
+            <a:pPr algn="ctr">
+              <a:defRPr sz="1900" lang="ja-JP"/>
+            </a:pPr>
+            <a14:m xmlns:a14="http://schemas.microsoft.com/office/drawing/2010/main">
+              <m:oMathPara xmlns:m="http://schemas.openxmlformats.org/officeDocument/2006/math">
+                <m:oMathParaPr>
+                  <m:jc m:val="center"/>
+                </m:oMathParaPr>
+                <m:oMath>
+                  <m:r>
+                    <m:t>J</m:t>
+                  </m:r>
+                  <m:r>
+                    <m:rPr>
+                      <m:sty m:val="p"/>
+                    </m:rPr>
+                    <m:t>(</m:t>
+                  </m:r>
+                  <m:r>
+                    <m:t>t</m:t>
+                  </m:r>
+                  <m:r>
+                    <m:rPr>
+                      <m:sty m:val="p"/>
+                    </m:rPr>
+                    <m:t>)</m:t>
+                  </m:r>
+                </m:oMath>
+              </m:oMathPara>
+            </a14:m>
+            <a:endParaRPr sz="1900" lang="ja-JP"/>
+          </a:p>
+        </p:txBody>
+      </p:sp>
+      <p:sp>
+        <p:nvSpPr>
+          <p:cNvPr id="8" name="Right Arrow 7"/>
           <p:cNvSpPr/>
           <p:nvPr/>
         </p:nvSpPr>
@@ -4956,14 +5220,14 @@
       </p:sp>
       <p:sp>
         <p:nvSpPr>
-          <p:cNvPr id="7" name="TextBox 6"/>
+          <p:cNvPr id="9" name="TextBox 8"/>
           <p:cNvSpPr txBox="1"/>
           <p:nvPr/>
         </p:nvSpPr>
         <p:spPr>
           <a:xfrm>
-            <a:off x="2971800" y="1188720"/>
-            <a:ext cx="457200" cy="365760"/>
+            <a:off x="2971800" y="1170432"/>
+            <a:ext cx="457200" cy="384048"/>
           </a:xfrm>
           <a:prstGeom prst="rect">
             <a:avLst/>
@@ -4971,79 +5235,422 @@
           <a:noFill/>
         </p:spPr>
         <p:txBody>
-          <a:bodyPr wrap="none" lIns="54864" rIns="54864" tIns="27432" bIns="27432" anchor="ctr">
+          <a:bodyPr wrap="none" lIns="0" rIns="0" tIns="0" bIns="0" anchor="ctr">
             <a:spAutoFit/>
           </a:bodyPr>
           <a:lstStyle/>
           <a:p>
-            <a:pPr algn="ctr"/>
-            <a:r>
-              <a:rPr sz="2000" b="1">
+            <a:pPr algn="ctr">
+              <a:defRPr sz="1900" lang="ja-JP"/>
+            </a:pPr>
+            <a14:m xmlns:a14="http://schemas.microsoft.com/office/drawing/2010/main">
+              <m:oMathPara xmlns:m="http://schemas.openxmlformats.org/officeDocument/2006/math">
+                <m:oMathParaPr>
+                  <m:jc m:val="center"/>
+                </m:oMathParaPr>
+                <m:oMath>
+                  <m:r>
+                    <m:t>c</m:t>
+                  </m:r>
+                </m:oMath>
+              </m:oMathPara>
+            </a14:m>
+            <a:endParaRPr sz="1900" lang="ja-JP"/>
+          </a:p>
+        </p:txBody>
+      </p:sp>
+      <p:sp>
+        <p:nvSpPr>
+          <p:cNvPr id="10" name="Left Arrow 9"/>
+          <p:cNvSpPr/>
+          <p:nvPr/>
+        </p:nvSpPr>
+        <p:spPr>
+          <a:xfrm>
+            <a:off x="2560320" y="3291840"/>
+            <a:ext cx="1280160" cy="320040"/>
+          </a:xfrm>
+          <a:prstGeom prst="leftArrow">
+            <a:avLst/>
+          </a:prstGeom>
+          <a:solidFill>
+            <a:srgbClr val="60798E"/>
+          </a:solidFill>
+          <a:ln>
+            <a:solidFill>
+              <a:srgbClr val="60798E"/>
+            </a:solidFill>
+          </a:ln>
+        </p:spPr>
+        <p:style>
+          <a:lnRef idx="1">
+            <a:schemeClr val="accent1"/>
+          </a:lnRef>
+          <a:fillRef idx="3">
+            <a:schemeClr val="accent1"/>
+          </a:fillRef>
+          <a:effectRef idx="2">
+            <a:schemeClr val="accent1"/>
+          </a:effectRef>
+          <a:fontRef idx="minor">
+            <a:schemeClr val="lt1"/>
+          </a:fontRef>
+        </p:style>
+        <p:txBody>
+          <a:bodyPr rtlCol="0" anchor="ctr"/>
+          <a:lstStyle/>
+          <a:p>
+            <a:pPr algn="ctr"/>
+          </a:p>
+        </p:txBody>
+      </p:sp>
+      <p:sp>
+        <p:nvSpPr>
+          <p:cNvPr id="11" name="TextBox 10"/>
+          <p:cNvSpPr txBox="1"/>
+          <p:nvPr/>
+        </p:nvSpPr>
+        <p:spPr>
+          <a:xfrm>
+            <a:off x="2971800" y="3657600"/>
+            <a:ext cx="457200" cy="384048"/>
+          </a:xfrm>
+          <a:prstGeom prst="rect">
+            <a:avLst/>
+          </a:prstGeom>
+          <a:noFill/>
+        </p:spPr>
+        <p:txBody>
+          <a:bodyPr wrap="none" lIns="0" rIns="0" tIns="0" bIns="0" anchor="ctr">
+            <a:spAutoFit/>
+          </a:bodyPr>
+          <a:lstStyle/>
+          <a:p>
+            <a:pPr algn="ctr">
+              <a:defRPr sz="1900" lang="ja-JP"/>
+            </a:pPr>
+            <a14:m xmlns:a14="http://schemas.microsoft.com/office/drawing/2010/main">
+              <m:oMathPara xmlns:m="http://schemas.openxmlformats.org/officeDocument/2006/math">
+                <m:oMathParaPr>
+                  <m:jc m:val="center"/>
+                </m:oMathParaPr>
+                <m:oMath>
+                  <m:r>
+                    <m:t>b</m:t>
+                  </m:r>
+                </m:oMath>
+              </m:oMathPara>
+            </a14:m>
+            <a:endParaRPr sz="1900" lang="ja-JP"/>
+          </a:p>
+        </p:txBody>
+      </p:sp>
+      <p:sp>
+        <p:nvSpPr>
+          <p:cNvPr id="12" name="Rounded Rectangle 11"/>
+          <p:cNvSpPr/>
+          <p:nvPr/>
+        </p:nvSpPr>
+        <p:spPr>
+          <a:xfrm>
+            <a:off x="6400800" y="1097280"/>
+            <a:ext cx="4663440" cy="3840480"/>
+          </a:xfrm>
+          <a:prstGeom prst="roundRect">
+            <a:avLst/>
+          </a:prstGeom>
+          <a:solidFill>
+            <a:srgbClr val="F3EDFF"/>
+          </a:solidFill>
+          <a:ln w="19050">
+            <a:solidFill>
+              <a:srgbClr val="60798E"/>
+            </a:solidFill>
+          </a:ln>
+        </p:spPr>
+        <p:style>
+          <a:lnRef idx="1">
+            <a:schemeClr val="accent1"/>
+          </a:lnRef>
+          <a:fillRef idx="3">
+            <a:schemeClr val="accent1"/>
+          </a:fillRef>
+          <a:effectRef idx="2">
+            <a:schemeClr val="accent1"/>
+          </a:effectRef>
+          <a:fontRef idx="minor">
+            <a:schemeClr val="lt1"/>
+          </a:fontRef>
+        </p:style>
+        <p:txBody>
+          <a:bodyPr rtlCol="0" anchor="ctr" lIns="54864" rIns="54864" tIns="27432" bIns="27432"/>
+          <a:lstStyle/>
+          <a:p>
+            <a:pPr algn="ctr"/>
+            <a:r>
+              <a:rPr sz="1800" b="0">
                 <a:solidFill>
                   <a:srgbClr val="21364A"/>
                 </a:solidFill>
                 <a:latin typeface="Yu Gothic"/>
               </a:rPr>
-              <a:t>c</a:t>
-            </a:r>
-          </a:p>
-        </p:txBody>
-      </p:sp>
-      <p:sp>
-        <p:nvSpPr>
-          <p:cNvPr id="8" name="Left Arrow 7"/>
-          <p:cNvSpPr/>
-          <p:nvPr/>
-        </p:nvSpPr>
-        <p:spPr>
-          <a:xfrm>
-            <a:off x="2560320" y="3291840"/>
-            <a:ext cx="1280160" cy="320040"/>
-          </a:xfrm>
-          <a:prstGeom prst="leftArrow">
-            <a:avLst/>
-          </a:prstGeom>
-          <a:solidFill>
-            <a:srgbClr val="60798E"/>
-          </a:solidFill>
-          <a:ln>
-            <a:solidFill>
-              <a:srgbClr val="60798E"/>
-            </a:solidFill>
-          </a:ln>
-        </p:spPr>
-        <p:style>
-          <a:lnRef idx="1">
-            <a:schemeClr val="accent1"/>
-          </a:lnRef>
-          <a:fillRef idx="3">
-            <a:schemeClr val="accent1"/>
-          </a:fillRef>
-          <a:effectRef idx="2">
-            <a:schemeClr val="accent1"/>
-          </a:effectRef>
-          <a:fontRef idx="minor">
-            <a:schemeClr val="lt1"/>
-          </a:fontRef>
-        </p:style>
-        <p:txBody>
-          <a:bodyPr rtlCol="0" anchor="ctr"/>
-          <a:lstStyle/>
-          <a:p>
-            <a:pPr algn="ctr"/>
-          </a:p>
-        </p:txBody>
-      </p:sp>
-      <p:sp>
-        <p:nvSpPr>
-          <p:cNvPr id="9" name="TextBox 8"/>
+              <a:t/>
+            </a:r>
+          </a:p>
+        </p:txBody>
+      </p:sp>
+      <p:sp>
+        <p:nvSpPr>
+          <p:cNvPr id="13" name="TextBox 12"/>
           <p:cNvSpPr txBox="1"/>
           <p:nvPr/>
         </p:nvSpPr>
         <p:spPr>
           <a:xfrm>
-            <a:off x="2971800" y="3657600"/>
-            <a:ext cx="457200" cy="365760"/>
+            <a:off x="6720840" y="1463040"/>
+            <a:ext cx="4023360" cy="914400"/>
+          </a:xfrm>
+          <a:prstGeom prst="rect">
+            <a:avLst/>
+          </a:prstGeom>
+          <a:noFill/>
+        </p:spPr>
+        <p:txBody>
+          <a:bodyPr wrap="none" lIns="0" rIns="0" tIns="0" bIns="0" anchor="ctr">
+            <a:spAutoFit/>
+          </a:bodyPr>
+          <a:lstStyle/>
+          <a:p>
+            <a:pPr algn="ctr">
+              <a:defRPr sz="1800" lang="ja-JP"/>
+            </a:pPr>
+            <a14:m xmlns:a14="http://schemas.microsoft.com/office/drawing/2010/main">
+              <m:oMathPara xmlns:m="http://schemas.openxmlformats.org/officeDocument/2006/math">
+                <m:oMathParaPr>
+                  <m:jc m:val="center"/>
+                </m:oMathParaPr>
+                <m:oMath>
+                  <m:f>
+                    <m:fPr>
+                      <m:type m:val="bar"/>
+                    </m:fPr>
+                    <m:num>
+                      <m:r>
+                        <m:t>d</m:t>
+                      </m:r>
+                    </m:num>
+                    <m:den>
+                      <m:r>
+                        <m:t>d</m:t>
+                      </m:r>
+                      <m:r>
+                        <m:t>t</m:t>
+                      </m:r>
+                    </m:den>
+                  </m:f>
+                  <m:d>
+                    <m:dPr>
+                      <m:begChr m:val="("/>
+                      <m:sepChr m:val=""/>
+                      <m:endChr m:val=")"/>
+                      <m:grow/>
+                    </m:dPr>
+                    <m:e>
+                      <m:m>
+                        <m:mPr>
+                          <m:baseJc m:val="center"/>
+                          <m:plcHide m:val="on"/>
+                          <m:mcs>
+                            <m:mc>
+                              <m:mcPr>
+                                <m:mcJc m:val="center"/>
+                                <m:count m:val="1"/>
+                              </m:mcPr>
+                            </m:mc>
+                          </m:mcs>
+                        </m:mPr>
+                        <m:mr>
+                          <m:e>
+                            <m:r>
+                              <m:t>R</m:t>
+                            </m:r>
+                          </m:e>
+                        </m:mr>
+                        <m:mr>
+                          <m:e>
+                            <m:r>
+                              <m:t>J</m:t>
+                            </m:r>
+                          </m:e>
+                        </m:mr>
+                      </m:m>
+                    </m:e>
+                  </m:d>
+                  <m:r>
+                    <m:rPr>
+                      <m:sty m:val="p"/>
+                    </m:rPr>
+                    <m:t>=</m:t>
+                  </m:r>
+                  <m:r>
+                    <m:t>M</m:t>
+                  </m:r>
+                  <m:d>
+                    <m:dPr>
+                      <m:begChr m:val="("/>
+                      <m:sepChr m:val=""/>
+                      <m:endChr m:val=")"/>
+                      <m:grow/>
+                    </m:dPr>
+                    <m:e>
+                      <m:m>
+                        <m:mPr>
+                          <m:baseJc m:val="center"/>
+                          <m:plcHide m:val="on"/>
+                          <m:mcs>
+                            <m:mc>
+                              <m:mcPr>
+                                <m:mcJc m:val="center"/>
+                                <m:count m:val="1"/>
+                              </m:mcPr>
+                            </m:mc>
+                          </m:mcs>
+                        </m:mPr>
+                        <m:mr>
+                          <m:e>
+                            <m:r>
+                              <m:t>R</m:t>
+                            </m:r>
+                          </m:e>
+                        </m:mr>
+                        <m:mr>
+                          <m:e>
+                            <m:r>
+                              <m:t>J</m:t>
+                            </m:r>
+                          </m:e>
+                        </m:mr>
+                      </m:m>
+                    </m:e>
+                  </m:d>
+                </m:oMath>
+              </m:oMathPara>
+            </a14:m>
+            <a:endParaRPr sz="1800" lang="ja-JP"/>
+          </a:p>
+        </p:txBody>
+      </p:sp>
+      <p:sp>
+        <p:nvSpPr>
+          <p:cNvPr id="14" name="TextBox 13"/>
+          <p:cNvSpPr txBox="1"/>
+          <p:nvPr/>
+        </p:nvSpPr>
+        <p:spPr>
+          <a:xfrm>
+            <a:off x="7406640" y="2606040"/>
+            <a:ext cx="2651760" cy="960120"/>
+          </a:xfrm>
+          <a:prstGeom prst="rect">
+            <a:avLst/>
+          </a:prstGeom>
+          <a:noFill/>
+        </p:spPr>
+        <p:txBody>
+          <a:bodyPr wrap="none" lIns="0" rIns="0" tIns="0" bIns="0" anchor="ctr">
+            <a:spAutoFit/>
+          </a:bodyPr>
+          <a:lstStyle/>
+          <a:p>
+            <a:pPr algn="ctr">
+              <a:defRPr sz="2000" lang="ja-JP"/>
+            </a:pPr>
+            <a14:m xmlns:a14="http://schemas.microsoft.com/office/drawing/2010/main">
+              <m:oMathPara xmlns:m="http://schemas.openxmlformats.org/officeDocument/2006/math">
+                <m:oMathParaPr>
+                  <m:jc m:val="center"/>
+                </m:oMathParaPr>
+                <m:oMath>
+                  <m:r>
+                    <m:t>M</m:t>
+                  </m:r>
+                  <m:r>
+                    <m:rPr>
+                      <m:sty m:val="p"/>
+                    </m:rPr>
+                    <m:t>=</m:t>
+                  </m:r>
+                  <m:d>
+                    <m:dPr>
+                      <m:begChr m:val="("/>
+                      <m:sepChr m:val=""/>
+                      <m:endChr m:val=")"/>
+                      <m:grow/>
+                    </m:dPr>
+                    <m:e>
+                      <m:m>
+                        <m:mPr>
+                          <m:baseJc m:val="center"/>
+                          <m:plcHide m:val="on"/>
+                          <m:mcs>
+                            <m:mc>
+                              <m:mcPr>
+                                <m:mcJc m:val="center"/>
+                                <m:count m:val="1"/>
+                              </m:mcPr>
+                            </m:mc>
+                            <m:mc>
+                              <m:mcPr>
+                                <m:mcJc m:val="center"/>
+                                <m:count m:val="1"/>
+                              </m:mcPr>
+                            </m:mc>
+                          </m:mcs>
+                        </m:mPr>
+                        <m:mr>
+                          <m:e>
+                            <m:r>
+                              <m:t>a</m:t>
+                            </m:r>
+                          </m:e>
+                          <m:e>
+                            <m:r>
+                              <m:t>b</m:t>
+                            </m:r>
+                          </m:e>
+                        </m:mr>
+                        <m:mr>
+                          <m:e>
+                            <m:r>
+                              <m:t>c</m:t>
+                            </m:r>
+                          </m:e>
+                          <m:e>
+                            <m:r>
+                              <m:t>d</m:t>
+                            </m:r>
+                          </m:e>
+                        </m:mr>
+                      </m:m>
+                    </m:e>
+                  </m:d>
+                </m:oMath>
+              </m:oMathPara>
+            </a14:m>
+            <a:endParaRPr sz="2000" lang="ja-JP"/>
+          </a:p>
+        </p:txBody>
+      </p:sp>
+      <p:sp>
+        <p:nvSpPr>
+          <p:cNvPr id="15" name="TextBox 14"/>
+          <p:cNvSpPr txBox="1"/>
+          <p:nvPr/>
+        </p:nvSpPr>
+        <p:spPr>
+          <a:xfrm>
+            <a:off x="6903720" y="3794760"/>
+            <a:ext cx="3657600" cy="685800"/>
           </a:xfrm>
           <a:prstGeom prst="rect">
             <a:avLst/>
@@ -5058,78 +5665,21 @@
           <a:p>
             <a:pPr algn="ctr"/>
             <a:r>
-              <a:rPr sz="2000" b="1">
+              <a:rPr sz="1600" b="0">
                 <a:solidFill>
-                  <a:srgbClr val="21364A"/>
+                  <a:srgbClr val="52677A"/>
                 </a:solidFill>
                 <a:latin typeface="Yu Gothic"/>
               </a:rPr>
-              <a:t>b</a:t>
-            </a:r>
-          </a:p>
-        </p:txBody>
-      </p:sp>
-      <p:sp>
-        <p:nvSpPr>
-          <p:cNvPr id="10" name="Rounded Rectangle 9"/>
-          <p:cNvSpPr/>
-          <p:nvPr/>
-        </p:nvSpPr>
-        <p:spPr>
-          <a:xfrm>
-            <a:off x="6400800" y="1097280"/>
-            <a:ext cx="4663440" cy="3840480"/>
-          </a:xfrm>
-          <a:prstGeom prst="roundRect">
-            <a:avLst/>
-          </a:prstGeom>
-          <a:solidFill>
-            <a:srgbClr val="F3EDFF"/>
-          </a:solidFill>
-          <a:ln w="19050">
-            <a:solidFill>
-              <a:srgbClr val="60798E"/>
-            </a:solidFill>
-          </a:ln>
-        </p:spPr>
-        <p:style>
-          <a:lnRef idx="1">
-            <a:schemeClr val="accent1"/>
-          </a:lnRef>
-          <a:fillRef idx="3">
-            <a:schemeClr val="accent1"/>
-          </a:fillRef>
-          <a:effectRef idx="2">
-            <a:schemeClr val="accent1"/>
-          </a:effectRef>
-          <a:fontRef idx="minor">
-            <a:schemeClr val="lt1"/>
-          </a:fontRef>
-        </p:style>
-        <p:txBody>
-          <a:bodyPr rtlCol="0" anchor="ctr" lIns="54864" rIns="54864" tIns="27432" bIns="27432"/>
-          <a:lstStyle/>
-          <a:p>
-            <a:pPr algn="ctr"/>
-            <a:r>
-              <a:rPr sz="2100" b="1">
-                <a:solidFill>
-                  <a:srgbClr val="21364A"/>
-                </a:solidFill>
-                <a:latin typeface="Yu Gothic"/>
-              </a:rPr>
-              <a:t>d/dt (R, J)ᵀ = M(R, J)ᵀ
-M = ⎛ a  b ⎞
-    ⎝ c  d ⎠
-第1行 → dR/dt
-第2行 → dJ/dt</a:t>
-            </a:r>
-          </a:p>
-        </p:txBody>
-      </p:sp>
-      <p:sp>
-        <p:nvSpPr>
-          <p:cNvPr id="11" name="TextBox 10"/>
+              <a:t>第1行はRの変化率
+第2行はJの変化率</a:t>
+            </a:r>
+          </a:p>
+        </p:txBody>
+      </p:sp>
+      <p:sp>
+        <p:nvSpPr>
+          <p:cNvPr id="16" name="TextBox 15"/>
           <p:cNvSpPr txBox="1"/>
           <p:nvPr/>
         </p:nvSpPr>
@@ -11049,7 +11599,7 @@
                 </a:solidFill>
                 <a:latin typeface="Yu Gothic"/>
               </a:rPr>
-              <a:t>uᵢⱼ</a:t>
+              <a:t>中央</a:t>
             </a:r>
           </a:p>
         </p:txBody>
@@ -11313,28 +11863,305 @@
           <a:p>
             <a:pPr algn="ctr"/>
             <a:r>
-              <a:rPr sz="2100" b="1">
+              <a:rPr sz="1800" b="0">
                 <a:solidFill>
                   <a:srgbClr val="21364A"/>
                 </a:solidFill>
                 <a:latin typeface="Yu Gothic"/>
               </a:rPr>
-              <a:t>Δuᵢⱼ ≈
-(右 + 左 + 上 + 下 − 4×中央) / Δx²</a:t>
-            </a:r>
-          </a:p>
-        </p:txBody>
-      </p:sp>
-      <p:sp>
-        <p:nvSpPr>
-          <p:cNvPr id="35" name="Rounded Rectangle 34"/>
+              <a:t/>
+            </a:r>
+          </a:p>
+        </p:txBody>
+      </p:sp>
+      <p:sp>
+        <p:nvSpPr>
+          <p:cNvPr id="35" name="TextBox 34"/>
+          <p:cNvSpPr txBox="1"/>
+          <p:nvPr/>
+        </p:nvSpPr>
+        <p:spPr>
+          <a:xfrm>
+            <a:off x="4983480" y="1554480"/>
+            <a:ext cx="6126480" cy="960120"/>
+          </a:xfrm>
+          <a:prstGeom prst="rect">
+            <a:avLst/>
+          </a:prstGeom>
+          <a:noFill/>
+        </p:spPr>
+        <p:txBody>
+          <a:bodyPr wrap="none" lIns="0" rIns="0" tIns="0" bIns="0" anchor="ctr">
+            <a:spAutoFit/>
+          </a:bodyPr>
+          <a:lstStyle/>
+          <a:p>
+            <a:pPr algn="ctr">
+              <a:defRPr sz="1800" lang="ja-JP"/>
+            </a:pPr>
+            <a14:m xmlns:a14="http://schemas.microsoft.com/office/drawing/2010/main">
+              <m:oMathPara xmlns:m="http://schemas.openxmlformats.org/officeDocument/2006/math">
+                <m:oMathParaPr>
+                  <m:jc m:val="center"/>
+                </m:oMathParaPr>
+                <m:oMath>
+                  <m:r>
+                    <m:rPr>
+                      <m:sty m:val="p"/>
+                    </m:rPr>
+                    <m:t>Δ</m:t>
+                  </m:r>
+                  <m:sSub>
+                    <m:e>
+                      <m:r>
+                        <m:t>u</m:t>
+                      </m:r>
+                    </m:e>
+                    <m:sub>
+                      <m:r>
+                        <m:t>i</m:t>
+                      </m:r>
+                      <m:r>
+                        <m:rPr>
+                          <m:sty m:val="p"/>
+                        </m:rPr>
+                        <m:t>,</m:t>
+                      </m:r>
+                      <m:r>
+                        <m:t>j</m:t>
+                      </m:r>
+                    </m:sub>
+                  </m:sSub>
+                  <m:r>
+                    <m:rPr>
+                      <m:sty m:val="p"/>
+                    </m:rPr>
+                    <m:t>=</m:t>
+                  </m:r>
+                  <m:f>
+                    <m:fPr>
+                      <m:type m:val="bar"/>
+                    </m:fPr>
+                    <m:num>
+                      <m:sSub>
+                        <m:e>
+                          <m:r>
+                            <m:t>u</m:t>
+                          </m:r>
+                        </m:e>
+                        <m:sub>
+                          <m:r>
+                            <m:t>i</m:t>
+                          </m:r>
+                          <m:r>
+                            <m:rPr>
+                              <m:sty m:val="p"/>
+                            </m:rPr>
+                            <m:t>+</m:t>
+                          </m:r>
+                          <m:r>
+                            <m:t>1</m:t>
+                          </m:r>
+                          <m:r>
+                            <m:rPr>
+                              <m:sty m:val="p"/>
+                            </m:rPr>
+                            <m:t>,</m:t>
+                          </m:r>
+                          <m:r>
+                            <m:t>j</m:t>
+                          </m:r>
+                        </m:sub>
+                      </m:sSub>
+                      <m:r>
+                        <m:rPr>
+                          <m:sty m:val="p"/>
+                        </m:rPr>
+                        <m:t>+</m:t>
+                      </m:r>
+                      <m:sSub>
+                        <m:e>
+                          <m:r>
+                            <m:t>u</m:t>
+                          </m:r>
+                        </m:e>
+                        <m:sub>
+                          <m:r>
+                            <m:t>i</m:t>
+                          </m:r>
+                          <m:r>
+                            <m:rPr>
+                              <m:sty m:val="p"/>
+                            </m:rPr>
+                            <m:t>−</m:t>
+                          </m:r>
+                          <m:r>
+                            <m:t>1</m:t>
+                          </m:r>
+                          <m:r>
+                            <m:rPr>
+                              <m:sty m:val="p"/>
+                            </m:rPr>
+                            <m:t>,</m:t>
+                          </m:r>
+                          <m:r>
+                            <m:t>j</m:t>
+                          </m:r>
+                        </m:sub>
+                      </m:sSub>
+                      <m:r>
+                        <m:rPr>
+                          <m:sty m:val="p"/>
+                        </m:rPr>
+                        <m:t>+</m:t>
+                      </m:r>
+                      <m:sSub>
+                        <m:e>
+                          <m:r>
+                            <m:t>u</m:t>
+                          </m:r>
+                        </m:e>
+                        <m:sub>
+                          <m:r>
+                            <m:t>i</m:t>
+                          </m:r>
+                          <m:r>
+                            <m:rPr>
+                              <m:sty m:val="p"/>
+                            </m:rPr>
+                            <m:t>,</m:t>
+                          </m:r>
+                          <m:r>
+                            <m:t>j</m:t>
+                          </m:r>
+                          <m:r>
+                            <m:rPr>
+                              <m:sty m:val="p"/>
+                            </m:rPr>
+                            <m:t>+</m:t>
+                          </m:r>
+                          <m:r>
+                            <m:t>1</m:t>
+                          </m:r>
+                        </m:sub>
+                      </m:sSub>
+                      <m:r>
+                        <m:rPr>
+                          <m:sty m:val="p"/>
+                        </m:rPr>
+                        <m:t>+</m:t>
+                      </m:r>
+                      <m:sSub>
+                        <m:e>
+                          <m:r>
+                            <m:t>u</m:t>
+                          </m:r>
+                        </m:e>
+                        <m:sub>
+                          <m:r>
+                            <m:t>i</m:t>
+                          </m:r>
+                          <m:r>
+                            <m:rPr>
+                              <m:sty m:val="p"/>
+                            </m:rPr>
+                            <m:t>,</m:t>
+                          </m:r>
+                          <m:r>
+                            <m:t>j</m:t>
+                          </m:r>
+                          <m:r>
+                            <m:rPr>
+                              <m:sty m:val="p"/>
+                            </m:rPr>
+                            <m:t>−</m:t>
+                          </m:r>
+                          <m:r>
+                            <m:t>1</m:t>
+                          </m:r>
+                        </m:sub>
+                      </m:sSub>
+                      <m:r>
+                        <m:rPr>
+                          <m:sty m:val="p"/>
+                        </m:rPr>
+                        <m:t>−</m:t>
+                      </m:r>
+                      <m:r>
+                        <m:t>4</m:t>
+                      </m:r>
+                      <m:sSub>
+                        <m:e>
+                          <m:r>
+                            <m:t>u</m:t>
+                          </m:r>
+                        </m:e>
+                        <m:sub>
+                          <m:r>
+                            <m:t>i</m:t>
+                          </m:r>
+                          <m:r>
+                            <m:rPr>
+                              <m:sty m:val="p"/>
+                            </m:rPr>
+                            <m:t>,</m:t>
+                          </m:r>
+                          <m:r>
+                            <m:t>j</m:t>
+                          </m:r>
+                        </m:sub>
+                      </m:sSub>
+                    </m:num>
+                    <m:den>
+                      <m:r>
+                        <m:rPr>
+                          <m:sty m:val="p"/>
+                        </m:rPr>
+                        <m:t>(</m:t>
+                      </m:r>
+                      <m:r>
+                        <m:rPr>
+                          <m:sty m:val="p"/>
+                        </m:rPr>
+                        <m:t>Δ</m:t>
+                      </m:r>
+                      <m:r>
+                        <m:t>x</m:t>
+                      </m:r>
+                      <m:sSup>
+                        <m:e>
+                          <m:r>
+                            <m:rPr>
+                              <m:sty m:val="p"/>
+                            </m:rPr>
+                            <m:t>)</m:t>
+                          </m:r>
+                        </m:e>
+                        <m:sup>
+                          <m:r>
+                            <m:t>2</m:t>
+                          </m:r>
+                        </m:sup>
+                      </m:sSup>
+                    </m:den>
+                  </m:f>
+                </m:oMath>
+              </m:oMathPara>
+            </a14:m>
+            <a:endParaRPr sz="1800" lang="ja-JP"/>
+          </a:p>
+        </p:txBody>
+      </p:sp>
+      <p:sp>
+        <p:nvSpPr>
+          <p:cNvPr id="36" name="Rounded Rectangle 35"/>
           <p:cNvSpPr/>
           <p:nvPr/>
         </p:nvSpPr>
         <p:spPr>
           <a:xfrm>
             <a:off x="4800600" y="3154680"/>
-            <a:ext cx="3063240" cy="1143000"/>
+            <a:ext cx="3063240" cy="1325880"/>
           </a:xfrm>
           <a:prstGeom prst="roundRect">
             <a:avLst/>
@@ -11368,28 +12195,102 @@
           <a:p>
             <a:pPr algn="ctr"/>
             <a:r>
-              <a:rPr sz="1700" b="0">
+              <a:rPr sz="1600" b="0">
                 <a:solidFill>
                   <a:srgbClr val="21364A"/>
                 </a:solidFill>
                 <a:latin typeface="Yu Gothic"/>
               </a:rPr>
               <a:t>中央が周囲より高い
-→ Δu &lt; 0 → 次に下がる</a:t>
-            </a:r>
-          </a:p>
-        </p:txBody>
-      </p:sp>
-      <p:sp>
-        <p:nvSpPr>
-          <p:cNvPr id="36" name="Rounded Rectangle 35"/>
+次時刻に中央の値が下がる</a:t>
+            </a:r>
+          </a:p>
+        </p:txBody>
+      </p:sp>
+      <p:sp>
+        <p:nvSpPr>
+          <p:cNvPr id="37" name="TextBox 36"/>
+          <p:cNvSpPr txBox="1"/>
+          <p:nvPr/>
+        </p:nvSpPr>
+        <p:spPr>
+          <a:xfrm>
+            <a:off x="5257800" y="3611880"/>
+            <a:ext cx="2148840" cy="347472"/>
+          </a:xfrm>
+          <a:prstGeom prst="rect">
+            <a:avLst/>
+          </a:prstGeom>
+          <a:noFill/>
+        </p:spPr>
+        <p:txBody>
+          <a:bodyPr wrap="none" lIns="0" rIns="0" tIns="0" bIns="0" anchor="ctr">
+            <a:spAutoFit/>
+          </a:bodyPr>
+          <a:lstStyle/>
+          <a:p>
+            <a:pPr algn="ctr">
+              <a:defRPr sz="1700" lang="ja-JP"/>
+            </a:pPr>
+            <a14:m xmlns:a14="http://schemas.microsoft.com/office/drawing/2010/main">
+              <m:oMathPara xmlns:m="http://schemas.openxmlformats.org/officeDocument/2006/math">
+                <m:oMathParaPr>
+                  <m:jc m:val="center"/>
+                </m:oMathParaPr>
+                <m:oMath>
+                  <m:r>
+                    <m:rPr>
+                      <m:sty m:val="p"/>
+                    </m:rPr>
+                    <m:t>Δ</m:t>
+                  </m:r>
+                  <m:sSub>
+                    <m:e>
+                      <m:r>
+                        <m:t>u</m:t>
+                      </m:r>
+                    </m:e>
+                    <m:sub>
+                      <m:r>
+                        <m:t>i</m:t>
+                      </m:r>
+                      <m:r>
+                        <m:rPr>
+                          <m:sty m:val="p"/>
+                        </m:rPr>
+                        <m:t>,</m:t>
+                      </m:r>
+                      <m:r>
+                        <m:t>j</m:t>
+                      </m:r>
+                    </m:sub>
+                  </m:sSub>
+                  <m:r>
+                    <m:rPr>
+                      <m:sty m:val="p"/>
+                    </m:rPr>
+                    <m:t>&lt;</m:t>
+                  </m:r>
+                  <m:r>
+                    <m:t>0</m:t>
+                  </m:r>
+                </m:oMath>
+              </m:oMathPara>
+            </a14:m>
+            <a:endParaRPr sz="1700" lang="ja-JP"/>
+          </a:p>
+        </p:txBody>
+      </p:sp>
+      <p:sp>
+        <p:nvSpPr>
+          <p:cNvPr id="38" name="Rounded Rectangle 37"/>
           <p:cNvSpPr/>
           <p:nvPr/>
         </p:nvSpPr>
         <p:spPr>
           <a:xfrm>
             <a:off x="8229600" y="3154680"/>
-            <a:ext cx="3063240" cy="1143000"/>
+            <a:ext cx="3063240" cy="1325880"/>
           </a:xfrm>
           <a:prstGeom prst="roundRect">
             <a:avLst/>
@@ -11423,21 +12324,95 @@
           <a:p>
             <a:pPr algn="ctr"/>
             <a:r>
-              <a:rPr sz="1700" b="0">
+              <a:rPr sz="1600" b="0">
                 <a:solidFill>
                   <a:srgbClr val="21364A"/>
                 </a:solidFill>
                 <a:latin typeface="Yu Gothic"/>
               </a:rPr>
               <a:t>中央が周囲より低い
-→ Δu &gt; 0 → 次に上がる</a:t>
-            </a:r>
-          </a:p>
-        </p:txBody>
-      </p:sp>
-      <p:sp>
-        <p:nvSpPr>
-          <p:cNvPr id="37" name="TextBox 36"/>
+次時刻に中央の値が上がる</a:t>
+            </a:r>
+          </a:p>
+        </p:txBody>
+      </p:sp>
+      <p:sp>
+        <p:nvSpPr>
+          <p:cNvPr id="39" name="TextBox 38"/>
+          <p:cNvSpPr txBox="1"/>
+          <p:nvPr/>
+        </p:nvSpPr>
+        <p:spPr>
+          <a:xfrm>
+            <a:off x="8686800" y="3611880"/>
+            <a:ext cx="2148840" cy="347472"/>
+          </a:xfrm>
+          <a:prstGeom prst="rect">
+            <a:avLst/>
+          </a:prstGeom>
+          <a:noFill/>
+        </p:spPr>
+        <p:txBody>
+          <a:bodyPr wrap="none" lIns="0" rIns="0" tIns="0" bIns="0" anchor="ctr">
+            <a:spAutoFit/>
+          </a:bodyPr>
+          <a:lstStyle/>
+          <a:p>
+            <a:pPr algn="ctr">
+              <a:defRPr sz="1700" lang="ja-JP"/>
+            </a:pPr>
+            <a14:m xmlns:a14="http://schemas.microsoft.com/office/drawing/2010/main">
+              <m:oMathPara xmlns:m="http://schemas.openxmlformats.org/officeDocument/2006/math">
+                <m:oMathParaPr>
+                  <m:jc m:val="center"/>
+                </m:oMathParaPr>
+                <m:oMath>
+                  <m:r>
+                    <m:rPr>
+                      <m:sty m:val="p"/>
+                    </m:rPr>
+                    <m:t>Δ</m:t>
+                  </m:r>
+                  <m:sSub>
+                    <m:e>
+                      <m:r>
+                        <m:t>u</m:t>
+                      </m:r>
+                    </m:e>
+                    <m:sub>
+                      <m:r>
+                        <m:t>i</m:t>
+                      </m:r>
+                      <m:r>
+                        <m:rPr>
+                          <m:sty m:val="p"/>
+                        </m:rPr>
+                        <m:t>,</m:t>
+                      </m:r>
+                      <m:r>
+                        <m:t>j</m:t>
+                      </m:r>
+                    </m:sub>
+                  </m:sSub>
+                  <m:r>
+                    <m:rPr>
+                      <m:sty m:val="p"/>
+                    </m:rPr>
+                    <m:t>&gt;</m:t>
+                  </m:r>
+                  <m:r>
+                    <m:t>0</m:t>
+                  </m:r>
+                </m:oMath>
+              </m:oMathPara>
+            </a14:m>
+            <a:endParaRPr sz="1700" lang="ja-JP"/>
+          </a:p>
+        </p:txBody>
+      </p:sp>
+      <p:sp>
+        <p:nvSpPr>
+          <p:cNvPr id="40" name="TextBox 39"/>
           <p:cNvSpPr txBox="1"/>
           <p:nvPr/>
         </p:nvSpPr>
@@ -11616,8 +12591,7 @@
                 <a:latin typeface="Yu Gothic"/>
               </a:rPr>
               <a:t>反応だけ
-各場所で2変数ODEが進む
-u ⇄ v</a:t>
+各場所で2変数ODEが進む</a:t>
             </a:r>
           </a:p>
         </p:txBody>
@@ -11625,6 +12599,56 @@
       <p:sp>
         <p:nvSpPr>
           <p:cNvPr id="5" name="TextBox 4"/>
+          <p:cNvSpPr txBox="1"/>
+          <p:nvPr/>
+        </p:nvSpPr>
+        <p:spPr>
+          <a:xfrm>
+            <a:off x="1325880" y="2788920"/>
+            <a:ext cx="1508760" cy="384048"/>
+          </a:xfrm>
+          <a:prstGeom prst="rect">
+            <a:avLst/>
+          </a:prstGeom>
+          <a:noFill/>
+        </p:spPr>
+        <p:txBody>
+          <a:bodyPr wrap="none" lIns="0" rIns="0" tIns="0" bIns="0" anchor="ctr">
+            <a:spAutoFit/>
+          </a:bodyPr>
+          <a:lstStyle/>
+          <a:p>
+            <a:pPr algn="ctr">
+              <a:defRPr sz="1900" lang="ja-JP"/>
+            </a:pPr>
+            <a14:m xmlns:a14="http://schemas.microsoft.com/office/drawing/2010/main">
+              <m:oMathPara xmlns:m="http://schemas.openxmlformats.org/officeDocument/2006/math">
+                <m:oMathParaPr>
+                  <m:jc m:val="center"/>
+                </m:oMathParaPr>
+                <m:oMath>
+                  <m:r>
+                    <m:t>u</m:t>
+                  </m:r>
+                  <m:r>
+                    <m:rPr>
+                      <m:sty m:val="p"/>
+                    </m:rPr>
+                    <m:t>⇄</m:t>
+                  </m:r>
+                  <m:r>
+                    <m:t>v</m:t>
+                  </m:r>
+                </m:oMath>
+              </m:oMathPara>
+            </a14:m>
+            <a:endParaRPr sz="1900" lang="ja-JP"/>
+          </a:p>
+        </p:txBody>
+      </p:sp>
+      <p:sp>
+        <p:nvSpPr>
+          <p:cNvPr id="6" name="TextBox 5"/>
           <p:cNvSpPr txBox="1"/>
           <p:nvPr/>
         </p:nvSpPr>
@@ -11659,7 +12683,7 @@
       </p:sp>
       <p:sp>
         <p:nvSpPr>
-          <p:cNvPr id="6" name="Rounded Rectangle 5"/>
+          <p:cNvPr id="7" name="Rounded Rectangle 6"/>
           <p:cNvSpPr/>
           <p:nvPr/>
         </p:nvSpPr>
@@ -11715,7 +12739,7 @@
       </p:sp>
       <p:sp>
         <p:nvSpPr>
-          <p:cNvPr id="7" name="Right Arrow 6"/>
+          <p:cNvPr id="8" name="Right Arrow 7"/>
           <p:cNvSpPr/>
           <p:nvPr/>
         </p:nvSpPr>
@@ -11760,7 +12784,7 @@
       </p:sp>
       <p:sp>
         <p:nvSpPr>
-          <p:cNvPr id="8" name="Rounded Rectangle 7"/>
+          <p:cNvPr id="9" name="Rounded Rectangle 8"/>
           <p:cNvSpPr/>
           <p:nvPr/>
         </p:nvSpPr>
@@ -11816,7 +12840,7 @@
       </p:sp>
       <p:sp>
         <p:nvSpPr>
-          <p:cNvPr id="9" name="TextBox 8"/>
+          <p:cNvPr id="10" name="TextBox 9"/>
           <p:cNvSpPr txBox="1"/>
           <p:nvPr/>
         </p:nvSpPr>
@@ -12595,77 +13619,297 @@
           <a:p>
             <a:pPr algn="ctr"/>
             <a:r>
-              <a:rPr sz="2200" b="1">
-                <a:solidFill>
-                  <a:srgbClr val="21364A"/>
-                </a:solidFill>
-                <a:latin typeface="Yu Gothic"/>
-              </a:rPr>
-              <a:t>A = ⎛ 0    0.8   0  ⎞
-    ⎜ 0     0   1.0 ⎟
-    ⎝0.5    0    0  ⎠</a:t>
-            </a:r>
-          </a:p>
-        </p:txBody>
-      </p:sp>
-      <p:sp>
-        <p:nvSpPr>
-          <p:cNvPr id="9" name="Rounded Rectangle 8"/>
-          <p:cNvSpPr/>
-          <p:nvPr/>
-        </p:nvSpPr>
-        <p:spPr>
-          <a:xfrm>
-            <a:off x="5257800" y="3840480"/>
-            <a:ext cx="4937760" cy="1051560"/>
-          </a:xfrm>
-          <a:prstGeom prst="roundRect">
-            <a:avLst/>
-          </a:prstGeom>
-          <a:solidFill>
-            <a:srgbClr val="EAF8EF"/>
-          </a:solidFill>
-          <a:ln w="19050">
-            <a:solidFill>
-              <a:srgbClr val="60798E"/>
-            </a:solidFill>
-          </a:ln>
-        </p:spPr>
-        <p:style>
-          <a:lnRef idx="1">
-            <a:schemeClr val="accent1"/>
-          </a:lnRef>
-          <a:fillRef idx="3">
-            <a:schemeClr val="accent1"/>
-          </a:fillRef>
-          <a:effectRef idx="2">
-            <a:schemeClr val="accent1"/>
-          </a:effectRef>
-          <a:fontRef idx="minor">
-            <a:schemeClr val="lt1"/>
-          </a:fontRef>
-        </p:style>
-        <p:txBody>
-          <a:bodyPr rtlCol="0" anchor="ctr" lIns="54864" rIns="54864" tIns="27432" bIns="27432"/>
-          <a:lstStyle/>
-          <a:p>
-            <a:pPr algn="ctr"/>
-            <a:r>
               <a:rPr sz="1800" b="0">
                 <a:solidFill>
                   <a:srgbClr val="21364A"/>
                 </a:solidFill>
                 <a:latin typeface="Yu Gothic"/>
               </a:rPr>
-              <a:t>(A x)₁ = 0.8 x₂
-第1行は頂点1へ入る影響</a:t>
-            </a:r>
-          </a:p>
-        </p:txBody>
-      </p:sp>
-      <p:sp>
-        <p:nvSpPr>
-          <p:cNvPr id="10" name="TextBox 9"/>
+              <a:t/>
+            </a:r>
+          </a:p>
+        </p:txBody>
+      </p:sp>
+      <p:sp>
+        <p:nvSpPr>
+          <p:cNvPr id="9" name="TextBox 8"/>
+          <p:cNvSpPr txBox="1"/>
+          <p:nvPr/>
+        </p:nvSpPr>
+        <p:spPr>
+          <a:xfrm>
+            <a:off x="5166360" y="1554480"/>
+            <a:ext cx="5120640" cy="1554480"/>
+          </a:xfrm>
+          <a:prstGeom prst="rect">
+            <a:avLst/>
+          </a:prstGeom>
+          <a:noFill/>
+        </p:spPr>
+        <p:txBody>
+          <a:bodyPr wrap="none" lIns="0" rIns="0" tIns="0" bIns="0" anchor="ctr">
+            <a:spAutoFit/>
+          </a:bodyPr>
+          <a:lstStyle/>
+          <a:p>
+            <a:pPr algn="ctr">
+              <a:defRPr sz="2100" lang="ja-JP"/>
+            </a:pPr>
+            <a14:m xmlns:a14="http://schemas.microsoft.com/office/drawing/2010/main">
+              <m:oMathPara xmlns:m="http://schemas.openxmlformats.org/officeDocument/2006/math">
+                <m:oMathParaPr>
+                  <m:jc m:val="center"/>
+                </m:oMathParaPr>
+                <m:oMath>
+                  <m:r>
+                    <m:t>A</m:t>
+                  </m:r>
+                  <m:r>
+                    <m:rPr>
+                      <m:sty m:val="p"/>
+                    </m:rPr>
+                    <m:t>=</m:t>
+                  </m:r>
+                  <m:d>
+                    <m:dPr>
+                      <m:begChr m:val="("/>
+                      <m:sepChr m:val=""/>
+                      <m:endChr m:val=")"/>
+                      <m:grow/>
+                    </m:dPr>
+                    <m:e>
+                      <m:m>
+                        <m:mPr>
+                          <m:baseJc m:val="center"/>
+                          <m:plcHide m:val="on"/>
+                          <m:mcs>
+                            <m:mc>
+                              <m:mcPr>
+                                <m:mcJc m:val="center"/>
+                                <m:count m:val="1"/>
+                              </m:mcPr>
+                            </m:mc>
+                            <m:mc>
+                              <m:mcPr>
+                                <m:mcJc m:val="center"/>
+                                <m:count m:val="1"/>
+                              </m:mcPr>
+                            </m:mc>
+                            <m:mc>
+                              <m:mcPr>
+                                <m:mcJc m:val="center"/>
+                                <m:count m:val="1"/>
+                              </m:mcPr>
+                            </m:mc>
+                          </m:mcs>
+                        </m:mPr>
+                        <m:mr>
+                          <m:e>
+                            <m:r>
+                              <m:t>0</m:t>
+                            </m:r>
+                          </m:e>
+                          <m:e>
+                            <m:r>
+                              <m:t>0.8</m:t>
+                            </m:r>
+                          </m:e>
+                          <m:e>
+                            <m:r>
+                              <m:t>0</m:t>
+                            </m:r>
+                          </m:e>
+                        </m:mr>
+                        <m:mr>
+                          <m:e>
+                            <m:r>
+                              <m:t>0</m:t>
+                            </m:r>
+                          </m:e>
+                          <m:e>
+                            <m:r>
+                              <m:t>0</m:t>
+                            </m:r>
+                          </m:e>
+                          <m:e>
+                            <m:r>
+                              <m:t>1.0</m:t>
+                            </m:r>
+                          </m:e>
+                        </m:mr>
+                        <m:mr>
+                          <m:e>
+                            <m:r>
+                              <m:t>0.5</m:t>
+                            </m:r>
+                          </m:e>
+                          <m:e>
+                            <m:r>
+                              <m:t>0</m:t>
+                            </m:r>
+                          </m:e>
+                          <m:e>
+                            <m:r>
+                              <m:t>0</m:t>
+                            </m:r>
+                          </m:e>
+                        </m:mr>
+                      </m:m>
+                    </m:e>
+                  </m:d>
+                </m:oMath>
+              </m:oMathPara>
+            </a14:m>
+            <a:endParaRPr sz="2100" lang="ja-JP"/>
+          </a:p>
+        </p:txBody>
+      </p:sp>
+      <p:sp>
+        <p:nvSpPr>
+          <p:cNvPr id="10" name="Rounded Rectangle 9"/>
+          <p:cNvSpPr/>
+          <p:nvPr/>
+        </p:nvSpPr>
+        <p:spPr>
+          <a:xfrm>
+            <a:off x="5257800" y="3840480"/>
+            <a:ext cx="4937760" cy="1234440"/>
+          </a:xfrm>
+          <a:prstGeom prst="roundRect">
+            <a:avLst/>
+          </a:prstGeom>
+          <a:solidFill>
+            <a:srgbClr val="EAF8EF"/>
+          </a:solidFill>
+          <a:ln w="19050">
+            <a:solidFill>
+              <a:srgbClr val="60798E"/>
+            </a:solidFill>
+          </a:ln>
+        </p:spPr>
+        <p:style>
+          <a:lnRef idx="1">
+            <a:schemeClr val="accent1"/>
+          </a:lnRef>
+          <a:fillRef idx="3">
+            <a:schemeClr val="accent1"/>
+          </a:fillRef>
+          <a:effectRef idx="2">
+            <a:schemeClr val="accent1"/>
+          </a:effectRef>
+          <a:fontRef idx="minor">
+            <a:schemeClr val="lt1"/>
+          </a:fontRef>
+        </p:style>
+        <p:txBody>
+          <a:bodyPr rtlCol="0" anchor="ctr" lIns="54864" rIns="54864" tIns="27432" bIns="27432"/>
+          <a:lstStyle/>
+          <a:p>
+            <a:pPr algn="ctr"/>
+            <a:r>
+              <a:rPr sz="1700" b="0">
+                <a:solidFill>
+                  <a:srgbClr val="21364A"/>
+                </a:solidFill>
+                <a:latin typeface="Yu Gothic"/>
+              </a:rPr>
+              <a:t>第1行は頂点1へ入る影響</a:t>
+            </a:r>
+          </a:p>
+        </p:txBody>
+      </p:sp>
+      <p:sp>
+        <p:nvSpPr>
+          <p:cNvPr id="11" name="TextBox 10"/>
+          <p:cNvSpPr txBox="1"/>
+          <p:nvPr/>
+        </p:nvSpPr>
+        <p:spPr>
+          <a:xfrm>
+            <a:off x="6446520" y="3950208"/>
+            <a:ext cx="2560320" cy="438912"/>
+          </a:xfrm>
+          <a:prstGeom prst="rect">
+            <a:avLst/>
+          </a:prstGeom>
+          <a:noFill/>
+        </p:spPr>
+        <p:txBody>
+          <a:bodyPr wrap="none" lIns="0" rIns="0" tIns="0" bIns="0" anchor="ctr">
+            <a:spAutoFit/>
+          </a:bodyPr>
+          <a:lstStyle/>
+          <a:p>
+            <a:pPr algn="ctr">
+              <a:defRPr sz="1800" lang="ja-JP"/>
+            </a:pPr>
+            <a14:m xmlns:a14="http://schemas.microsoft.com/office/drawing/2010/main">
+              <m:oMathPara xmlns:m="http://schemas.openxmlformats.org/officeDocument/2006/math">
+                <m:oMathParaPr>
+                  <m:jc m:val="center"/>
+                </m:oMathParaPr>
+                <m:oMath>
+                  <m:r>
+                    <m:rPr>
+                      <m:sty m:val="p"/>
+                    </m:rPr>
+                    <m:t>(</m:t>
+                  </m:r>
+                  <m:r>
+                    <m:t>A</m:t>
+                  </m:r>
+                  <m:r>
+                    <m:rPr>
+                      <m:sty m:val="bi"/>
+                    </m:rPr>
+                    <m:t>x</m:t>
+                  </m:r>
+                  <m:sSub>
+                    <m:e>
+                      <m:r>
+                        <m:rPr>
+                          <m:sty m:val="p"/>
+                        </m:rPr>
+                        <m:t>)</m:t>
+                      </m:r>
+                    </m:e>
+                    <m:sub>
+                      <m:r>
+                        <m:t>1</m:t>
+                      </m:r>
+                    </m:sub>
+                  </m:sSub>
+                  <m:r>
+                    <m:rPr>
+                      <m:sty m:val="p"/>
+                    </m:rPr>
+                    <m:t>=</m:t>
+                  </m:r>
+                  <m:r>
+                    <m:t>0.8</m:t>
+                  </m:r>
+                  <m:sSub>
+                    <m:e>
+                      <m:r>
+                        <m:t>x</m:t>
+                      </m:r>
+                    </m:e>
+                    <m:sub>
+                      <m:r>
+                        <m:t>2</m:t>
+                      </m:r>
+                    </m:sub>
+                  </m:sSub>
+                </m:oMath>
+              </m:oMathPara>
+            </a14:m>
+            <a:endParaRPr sz="1800" lang="ja-JP"/>
+          </a:p>
+        </p:txBody>
+      </p:sp>
+      <p:sp>
+        <p:nvSpPr>
+          <p:cNvPr id="12" name="TextBox 11"/>
           <p:cNvSpPr txBox="1"/>
           <p:nvPr/>
         </p:nvSpPr>
@@ -12837,21 +14081,80 @@
           <a:p>
             <a:pPr algn="ctr"/>
             <a:r>
-              <a:rPr sz="2000" b="1">
+              <a:rPr sz="1700" b="1">
                 <a:solidFill>
                   <a:srgbClr val="21364A"/>
                 </a:solidFill>
                 <a:latin typeface="Yu Gothic"/>
               </a:rPr>
               <a:t>体部
-T = Tᵦ</a:t>
-            </a:r>
-          </a:p>
-        </p:txBody>
-      </p:sp>
-      <p:sp>
-        <p:nvSpPr>
-          <p:cNvPr id="5" name="Rectangle 4"/>
+根元温度を固定</a:t>
+            </a:r>
+          </a:p>
+        </p:txBody>
+      </p:sp>
+      <p:sp>
+        <p:nvSpPr>
+          <p:cNvPr id="5" name="TextBox 4"/>
+          <p:cNvSpPr txBox="1"/>
+          <p:nvPr/>
+        </p:nvSpPr>
+        <p:spPr>
+          <a:xfrm>
+            <a:off x="621792" y="2944368"/>
+            <a:ext cx="1051560" cy="347472"/>
+          </a:xfrm>
+          <a:prstGeom prst="rect">
+            <a:avLst/>
+          </a:prstGeom>
+          <a:noFill/>
+        </p:spPr>
+        <p:txBody>
+          <a:bodyPr wrap="none" lIns="0" rIns="0" tIns="0" bIns="0" anchor="ctr">
+            <a:spAutoFit/>
+          </a:bodyPr>
+          <a:lstStyle/>
+          <a:p>
+            <a:pPr algn="ctr">
+              <a:defRPr sz="1600" lang="ja-JP"/>
+            </a:pPr>
+            <a14:m xmlns:a14="http://schemas.microsoft.com/office/drawing/2010/main">
+              <m:oMathPara xmlns:m="http://schemas.openxmlformats.org/officeDocument/2006/math">
+                <m:oMathParaPr>
+                  <m:jc m:val="center"/>
+                </m:oMathParaPr>
+                <m:oMath>
+                  <m:r>
+                    <m:t>T</m:t>
+                  </m:r>
+                  <m:r>
+                    <m:rPr>
+                      <m:sty m:val="p"/>
+                    </m:rPr>
+                    <m:t>=</m:t>
+                  </m:r>
+                  <m:sSub>
+                    <m:e>
+                      <m:r>
+                        <m:t>T</m:t>
+                      </m:r>
+                    </m:e>
+                    <m:sub>
+                      <m:r>
+                        <m:t>b</m:t>
+                      </m:r>
+                    </m:sub>
+                  </m:sSub>
+                </m:oMath>
+              </m:oMathPara>
+            </a14:m>
+            <a:endParaRPr sz="1600" lang="ja-JP"/>
+          </a:p>
+        </p:txBody>
+      </p:sp>
+      <p:sp>
+        <p:nvSpPr>
+          <p:cNvPr id="6" name="Rectangle 5"/>
           <p:cNvSpPr/>
           <p:nvPr/>
         </p:nvSpPr>
@@ -12898,15 +14201,85 @@
                 </a:solidFill>
                 <a:latin typeface="Yu Gothic"/>
               </a:rPr>
-              <a:t>フィン内部の熱伝導
-−kA dT/dx</a:t>
-            </a:r>
-          </a:p>
-        </p:txBody>
-      </p:sp>
-      <p:sp>
-        <p:nvSpPr>
-          <p:cNvPr id="6" name="Right Arrow 5"/>
+              <a:t>フィン内部の熱伝導</a:t>
+            </a:r>
+          </a:p>
+        </p:txBody>
+      </p:sp>
+      <p:sp>
+        <p:nvSpPr>
+          <p:cNvPr id="7" name="TextBox 6"/>
+          <p:cNvSpPr txBox="1"/>
+          <p:nvPr/>
+        </p:nvSpPr>
+        <p:spPr>
+          <a:xfrm>
+            <a:off x="4800600" y="2761488"/>
+            <a:ext cx="2743200" cy="438912"/>
+          </a:xfrm>
+          <a:prstGeom prst="rect">
+            <a:avLst/>
+          </a:prstGeom>
+          <a:noFill/>
+        </p:spPr>
+        <p:txBody>
+          <a:bodyPr wrap="none" lIns="0" rIns="0" tIns="0" bIns="0" anchor="ctr">
+            <a:spAutoFit/>
+          </a:bodyPr>
+          <a:lstStyle/>
+          <a:p>
+            <a:pPr algn="ctr">
+              <a:defRPr sz="1900" lang="ja-JP"/>
+            </a:pPr>
+            <a14:m xmlns:a14="http://schemas.microsoft.com/office/drawing/2010/main">
+              <m:oMathPara xmlns:m="http://schemas.openxmlformats.org/officeDocument/2006/math">
+                <m:oMathParaPr>
+                  <m:jc m:val="center"/>
+                </m:oMathParaPr>
+                <m:oMath>
+                  <m:r>
+                    <m:rPr>
+                      <m:sty m:val="p"/>
+                    </m:rPr>
+                    <m:t>−</m:t>
+                  </m:r>
+                  <m:r>
+                    <m:t>k</m:t>
+                  </m:r>
+                  <m:r>
+                    <m:t>A</m:t>
+                  </m:r>
+                  <m:f>
+                    <m:fPr>
+                      <m:type m:val="bar"/>
+                    </m:fPr>
+                    <m:num>
+                      <m:r>
+                        <m:t>d</m:t>
+                      </m:r>
+                      <m:r>
+                        <m:t>T</m:t>
+                      </m:r>
+                    </m:num>
+                    <m:den>
+                      <m:r>
+                        <m:t>d</m:t>
+                      </m:r>
+                      <m:r>
+                        <m:t>x</m:t>
+                      </m:r>
+                    </m:den>
+                  </m:f>
+                </m:oMath>
+              </m:oMathPara>
+            </a14:m>
+            <a:endParaRPr sz="1900" lang="ja-JP"/>
+          </a:p>
+        </p:txBody>
+      </p:sp>
+      <p:sp>
+        <p:nvSpPr>
+          <p:cNvPr id="8" name="Right Arrow 7"/>
           <p:cNvSpPr/>
           <p:nvPr/>
         </p:nvSpPr>
@@ -12951,7 +14324,7 @@
       </p:sp>
       <p:sp>
         <p:nvSpPr>
-          <p:cNvPr id="7" name="Up Arrow 6"/>
+          <p:cNvPr id="9" name="Up Arrow 8"/>
           <p:cNvSpPr/>
           <p:nvPr/>
         </p:nvSpPr>
@@ -12996,7 +14369,7 @@
       </p:sp>
       <p:sp>
         <p:nvSpPr>
-          <p:cNvPr id="8" name="Down Arrow 7"/>
+          <p:cNvPr id="10" name="Down Arrow 9"/>
           <p:cNvSpPr/>
           <p:nvPr/>
         </p:nvSpPr>
@@ -13041,7 +14414,7 @@
       </p:sp>
       <p:sp>
         <p:nvSpPr>
-          <p:cNvPr id="9" name="Up Arrow 8"/>
+          <p:cNvPr id="11" name="Up Arrow 10"/>
           <p:cNvSpPr/>
           <p:nvPr/>
         </p:nvSpPr>
@@ -13086,7 +14459,7 @@
       </p:sp>
       <p:sp>
         <p:nvSpPr>
-          <p:cNvPr id="10" name="Down Arrow 9"/>
+          <p:cNvPr id="12" name="Down Arrow 11"/>
           <p:cNvSpPr/>
           <p:nvPr/>
         </p:nvSpPr>
@@ -13131,7 +14504,7 @@
       </p:sp>
       <p:sp>
         <p:nvSpPr>
-          <p:cNvPr id="11" name="Up Arrow 10"/>
+          <p:cNvPr id="13" name="Up Arrow 12"/>
           <p:cNvSpPr/>
           <p:nvPr/>
         </p:nvSpPr>
@@ -13176,7 +14549,7 @@
       </p:sp>
       <p:sp>
         <p:nvSpPr>
-          <p:cNvPr id="12" name="Down Arrow 11"/>
+          <p:cNvPr id="14" name="Down Arrow 13"/>
           <p:cNvSpPr/>
           <p:nvPr/>
         </p:nvSpPr>
@@ -13221,7 +14594,7 @@
       </p:sp>
       <p:sp>
         <p:nvSpPr>
-          <p:cNvPr id="13" name="Up Arrow 12"/>
+          <p:cNvPr id="15" name="Up Arrow 14"/>
           <p:cNvSpPr/>
           <p:nvPr/>
         </p:nvSpPr>
@@ -13266,7 +14639,7 @@
       </p:sp>
       <p:sp>
         <p:nvSpPr>
-          <p:cNvPr id="14" name="Down Arrow 13"/>
+          <p:cNvPr id="16" name="Down Arrow 15"/>
           <p:cNvSpPr/>
           <p:nvPr/>
         </p:nvSpPr>
@@ -13311,7 +14684,7 @@
       </p:sp>
       <p:sp>
         <p:nvSpPr>
-          <p:cNvPr id="15" name="Up Arrow 14"/>
+          <p:cNvPr id="17" name="Up Arrow 16"/>
           <p:cNvSpPr/>
           <p:nvPr/>
         </p:nvSpPr>
@@ -13356,7 +14729,7 @@
       </p:sp>
       <p:sp>
         <p:nvSpPr>
-          <p:cNvPr id="16" name="Down Arrow 15"/>
+          <p:cNvPr id="18" name="Down Arrow 17"/>
           <p:cNvSpPr/>
           <p:nvPr/>
         </p:nvSpPr>
@@ -13401,14 +14774,14 @@
       </p:sp>
       <p:sp>
         <p:nvSpPr>
-          <p:cNvPr id="17" name="TextBox 16"/>
+          <p:cNvPr id="19" name="TextBox 18"/>
           <p:cNvSpPr txBox="1"/>
           <p:nvPr/>
         </p:nvSpPr>
         <p:spPr>
           <a:xfrm>
-            <a:off x="2743200" y="868680"/>
-            <a:ext cx="7132320" cy="411480"/>
+            <a:off x="2743200" y="713232"/>
+            <a:ext cx="7132320" cy="384048"/>
           </a:xfrm>
           <a:prstGeom prst="rect">
             <a:avLst/>
@@ -13429,14 +14802,94 @@
                 </a:solidFill>
                 <a:latin typeface="Yu Gothic"/>
               </a:rPr>
-              <a:t>表面から対流 hP(T − T∞)</a:t>
-            </a:r>
-          </a:p>
-        </p:txBody>
-      </p:sp>
-      <p:sp>
-        <p:nvSpPr>
-          <p:cNvPr id="18" name="TextBox 17"/>
+              <a:t>表面から周囲へ対流で放熱する</a:t>
+            </a:r>
+          </a:p>
+        </p:txBody>
+      </p:sp>
+      <p:sp>
+        <p:nvSpPr>
+          <p:cNvPr id="20" name="TextBox 19"/>
+          <p:cNvSpPr txBox="1"/>
+          <p:nvPr/>
+        </p:nvSpPr>
+        <p:spPr>
+          <a:xfrm>
+            <a:off x="4663440" y="1060704"/>
+            <a:ext cx="3291840" cy="384048"/>
+          </a:xfrm>
+          <a:prstGeom prst="rect">
+            <a:avLst/>
+          </a:prstGeom>
+          <a:noFill/>
+        </p:spPr>
+        <p:txBody>
+          <a:bodyPr wrap="none" lIns="0" rIns="0" tIns="0" bIns="0" anchor="ctr">
+            <a:spAutoFit/>
+          </a:bodyPr>
+          <a:lstStyle/>
+          <a:p>
+            <a:pPr algn="ctr">
+              <a:defRPr sz="1800" lang="ja-JP"/>
+            </a:pPr>
+            <a14:m xmlns:a14="http://schemas.microsoft.com/office/drawing/2010/main">
+              <m:oMathPara xmlns:m="http://schemas.openxmlformats.org/officeDocument/2006/math">
+                <m:oMathParaPr>
+                  <m:jc m:val="center"/>
+                </m:oMathParaPr>
+                <m:oMath>
+                  <m:r>
+                    <m:t>h</m:t>
+                  </m:r>
+                  <m:r>
+                    <m:t>P</m:t>
+                  </m:r>
+                  <m:r>
+                    <m:rPr>
+                      <m:sty m:val="p"/>
+                    </m:rPr>
+                    <m:t>(</m:t>
+                  </m:r>
+                  <m:r>
+                    <m:t>T</m:t>
+                  </m:r>
+                  <m:r>
+                    <m:rPr>
+                      <m:sty m:val="p"/>
+                    </m:rPr>
+                    <m:t>−</m:t>
+                  </m:r>
+                  <m:sSub>
+                    <m:e>
+                      <m:r>
+                        <m:t>T</m:t>
+                      </m:r>
+                    </m:e>
+                    <m:sub>
+                      <m:r>
+                        <m:rPr>
+                          <m:sty m:val="p"/>
+                        </m:rPr>
+                        <m:t>∞</m:t>
+                      </m:r>
+                    </m:sub>
+                  </m:sSub>
+                  <m:r>
+                    <m:rPr>
+                      <m:sty m:val="p"/>
+                    </m:rPr>
+                    <m:t>)</m:t>
+                  </m:r>
+                </m:oMath>
+              </m:oMathPara>
+            </a14:m>
+            <a:endParaRPr sz="1800" lang="ja-JP"/>
+          </a:p>
+        </p:txBody>
+      </p:sp>
+      <p:sp>
+        <p:nvSpPr>
+          <p:cNvPr id="21" name="TextBox 20"/>
           <p:cNvSpPr txBox="1"/>
           <p:nvPr/>
         </p:nvSpPr>
@@ -13614,15 +15067,65 @@
                 </a:solidFill>
                 <a:latin typeface="Yu Gothic"/>
               </a:rPr>
-              <a:t>板の内部 Ω
-熱伝導 kΔT</a:t>
-            </a:r>
-          </a:p>
-        </p:txBody>
-      </p:sp>
-      <p:sp>
-        <p:nvSpPr>
-          <p:cNvPr id="5" name="Rectangle 4"/>
+              <a:t>板の内部領域
+熱伝導方程式を解く</a:t>
+            </a:r>
+          </a:p>
+        </p:txBody>
+      </p:sp>
+      <p:sp>
+        <p:nvSpPr>
+          <p:cNvPr id="5" name="TextBox 4"/>
+          <p:cNvSpPr txBox="1"/>
+          <p:nvPr/>
+        </p:nvSpPr>
+        <p:spPr>
+          <a:xfrm>
+            <a:off x="2971800" y="2880360"/>
+            <a:ext cx="1554480" cy="457200"/>
+          </a:xfrm>
+          <a:prstGeom prst="rect">
+            <a:avLst/>
+          </a:prstGeom>
+          <a:noFill/>
+        </p:spPr>
+        <p:txBody>
+          <a:bodyPr wrap="none" lIns="0" rIns="0" tIns="0" bIns="0" anchor="ctr">
+            <a:spAutoFit/>
+          </a:bodyPr>
+          <a:lstStyle/>
+          <a:p>
+            <a:pPr algn="ctr">
+              <a:defRPr sz="2000" lang="ja-JP"/>
+            </a:pPr>
+            <a14:m xmlns:a14="http://schemas.microsoft.com/office/drawing/2010/main">
+              <m:oMathPara xmlns:m="http://schemas.openxmlformats.org/officeDocument/2006/math">
+                <m:oMathParaPr>
+                  <m:jc m:val="center"/>
+                </m:oMathParaPr>
+                <m:oMath>
+                  <m:r>
+                    <m:t>k</m:t>
+                  </m:r>
+                  <m:r>
+                    <m:rPr>
+                      <m:sty m:val="p"/>
+                    </m:rPr>
+                    <m:t>Δ</m:t>
+                  </m:r>
+                  <m:r>
+                    <m:t>T</m:t>
+                  </m:r>
+                </m:oMath>
+              </m:oMathPara>
+            </a14:m>
+            <a:endParaRPr sz="2000" lang="ja-JP"/>
+          </a:p>
+        </p:txBody>
+      </p:sp>
+      <p:sp>
+        <p:nvSpPr>
+          <p:cNvPr id="6" name="Rectangle 5"/>
           <p:cNvSpPr/>
           <p:nvPr/>
         </p:nvSpPr>
@@ -13669,14 +15172,73 @@
                 </a:solidFill>
                 <a:latin typeface="Yu Gothic"/>
               </a:rPr>
-              <a:t>根元: T = Tᵦ（固定温度）</a:t>
-            </a:r>
-          </a:p>
-        </p:txBody>
-      </p:sp>
-      <p:sp>
-        <p:nvSpPr>
-          <p:cNvPr id="6" name="Up Arrow 5"/>
+              <a:t>根元は固定温度</a:t>
+            </a:r>
+          </a:p>
+        </p:txBody>
+      </p:sp>
+      <p:sp>
+        <p:nvSpPr>
+          <p:cNvPr id="7" name="TextBox 6"/>
+          <p:cNvSpPr txBox="1"/>
+          <p:nvPr/>
+        </p:nvSpPr>
+        <p:spPr>
+          <a:xfrm>
+            <a:off x="4846320" y="4160520"/>
+            <a:ext cx="1234440" cy="347472"/>
+          </a:xfrm>
+          <a:prstGeom prst="rect">
+            <a:avLst/>
+          </a:prstGeom>
+          <a:noFill/>
+        </p:spPr>
+        <p:txBody>
+          <a:bodyPr wrap="none" lIns="0" rIns="0" tIns="0" bIns="0" anchor="ctr">
+            <a:spAutoFit/>
+          </a:bodyPr>
+          <a:lstStyle/>
+          <a:p>
+            <a:pPr algn="ctr">
+              <a:defRPr sz="1700" lang="ja-JP"/>
+            </a:pPr>
+            <a14:m xmlns:a14="http://schemas.microsoft.com/office/drawing/2010/main">
+              <m:oMathPara xmlns:m="http://schemas.openxmlformats.org/officeDocument/2006/math">
+                <m:oMathParaPr>
+                  <m:jc m:val="center"/>
+                </m:oMathParaPr>
+                <m:oMath>
+                  <m:r>
+                    <m:t>T</m:t>
+                  </m:r>
+                  <m:r>
+                    <m:rPr>
+                      <m:sty m:val="p"/>
+                    </m:rPr>
+                    <m:t>=</m:t>
+                  </m:r>
+                  <m:sSub>
+                    <m:e>
+                      <m:r>
+                        <m:t>T</m:t>
+                      </m:r>
+                    </m:e>
+                    <m:sub>
+                      <m:r>
+                        <m:t>b</m:t>
+                      </m:r>
+                    </m:sub>
+                  </m:sSub>
+                </m:oMath>
+              </m:oMathPara>
+            </a14:m>
+            <a:endParaRPr sz="1700" lang="ja-JP"/>
+          </a:p>
+        </p:txBody>
+      </p:sp>
+      <p:sp>
+        <p:nvSpPr>
+          <p:cNvPr id="8" name="Up Arrow 7"/>
           <p:cNvSpPr/>
           <p:nvPr/>
         </p:nvSpPr>
@@ -13721,7 +15283,7 @@
       </p:sp>
       <p:sp>
         <p:nvSpPr>
-          <p:cNvPr id="7" name="Up Arrow 6"/>
+          <p:cNvPr id="9" name="Up Arrow 8"/>
           <p:cNvSpPr/>
           <p:nvPr/>
         </p:nvSpPr>
@@ -13766,7 +15328,7 @@
       </p:sp>
       <p:sp>
         <p:nvSpPr>
-          <p:cNvPr id="8" name="Up Arrow 7"/>
+          <p:cNvPr id="10" name="Up Arrow 9"/>
           <p:cNvSpPr/>
           <p:nvPr/>
         </p:nvSpPr>
@@ -13811,7 +15373,7 @@
       </p:sp>
       <p:sp>
         <p:nvSpPr>
-          <p:cNvPr id="9" name="Up Arrow 8"/>
+          <p:cNvPr id="11" name="Up Arrow 10"/>
           <p:cNvSpPr/>
           <p:nvPr/>
         </p:nvSpPr>
@@ -13856,7 +15418,7 @@
       </p:sp>
       <p:sp>
         <p:nvSpPr>
-          <p:cNvPr id="10" name="Up Arrow 9"/>
+          <p:cNvPr id="12" name="Up Arrow 11"/>
           <p:cNvSpPr/>
           <p:nvPr/>
         </p:nvSpPr>
@@ -13901,7 +15463,7 @@
       </p:sp>
       <p:sp>
         <p:nvSpPr>
-          <p:cNvPr id="11" name="Left Arrow 10"/>
+          <p:cNvPr id="13" name="Left Arrow 12"/>
           <p:cNvSpPr/>
           <p:nvPr/>
         </p:nvSpPr>
@@ -13946,7 +15508,7 @@
       </p:sp>
       <p:sp>
         <p:nvSpPr>
-          <p:cNvPr id="12" name="Right Arrow 11"/>
+          <p:cNvPr id="14" name="Right Arrow 13"/>
           <p:cNvSpPr/>
           <p:nvPr/>
         </p:nvSpPr>
@@ -13991,7 +15553,7 @@
       </p:sp>
       <p:sp>
         <p:nvSpPr>
-          <p:cNvPr id="13" name="Rounded Rectangle 12"/>
+          <p:cNvPr id="15" name="Rounded Rectangle 14"/>
           <p:cNvSpPr/>
           <p:nvPr/>
         </p:nvSpPr>
@@ -14049,14 +15611,14 @@
       </p:sp>
       <p:sp>
         <p:nvSpPr>
-          <p:cNvPr id="14" name="TextBox 13"/>
+          <p:cNvPr id="16" name="TextBox 15"/>
           <p:cNvSpPr txBox="1"/>
           <p:nvPr/>
         </p:nvSpPr>
         <p:spPr>
           <a:xfrm>
-            <a:off x="914400" y="5074920"/>
-            <a:ext cx="6217920" cy="548640"/>
+            <a:off x="914400" y="4846320"/>
+            <a:ext cx="6217920" cy="384048"/>
           </a:xfrm>
           <a:prstGeom prst="rect">
             <a:avLst/>
@@ -14077,8 +15639,127 @@
                 </a:solidFill>
                 <a:latin typeface="Yu Gothic"/>
               </a:rPr>
-              <a:t>側面・先端: −k ∂T/∂n = h(T − T∞)</a:t>
-            </a:r>
+              <a:t>側面・先端の対流境界条件</a:t>
+            </a:r>
+          </a:p>
+        </p:txBody>
+      </p:sp>
+      <p:sp>
+        <p:nvSpPr>
+          <p:cNvPr id="17" name="TextBox 16"/>
+          <p:cNvSpPr txBox="1"/>
+          <p:nvPr/>
+        </p:nvSpPr>
+        <p:spPr>
+          <a:xfrm>
+            <a:off x="1508760" y="5230368"/>
+            <a:ext cx="5029200" cy="502920"/>
+          </a:xfrm>
+          <a:prstGeom prst="rect">
+            <a:avLst/>
+          </a:prstGeom>
+          <a:noFill/>
+        </p:spPr>
+        <p:txBody>
+          <a:bodyPr wrap="none" lIns="0" rIns="0" tIns="0" bIns="0" anchor="ctr">
+            <a:spAutoFit/>
+          </a:bodyPr>
+          <a:lstStyle/>
+          <a:p>
+            <a:pPr algn="ctr">
+              <a:defRPr sz="1700" lang="ja-JP"/>
+            </a:pPr>
+            <a14:m xmlns:a14="http://schemas.microsoft.com/office/drawing/2010/main">
+              <m:oMathPara xmlns:m="http://schemas.openxmlformats.org/officeDocument/2006/math">
+                <m:oMathParaPr>
+                  <m:jc m:val="center"/>
+                </m:oMathParaPr>
+                <m:oMath>
+                  <m:r>
+                    <m:rPr>
+                      <m:sty m:val="p"/>
+                    </m:rPr>
+                    <m:t>−</m:t>
+                  </m:r>
+                  <m:r>
+                    <m:t>k</m:t>
+                  </m:r>
+                  <m:f>
+                    <m:fPr>
+                      <m:type m:val="bar"/>
+                    </m:fPr>
+                    <m:num>
+                      <m:r>
+                        <m:rPr>
+                          <m:sty m:val="p"/>
+                        </m:rPr>
+                        <m:t>∂</m:t>
+                      </m:r>
+                      <m:r>
+                        <m:t>T</m:t>
+                      </m:r>
+                    </m:num>
+                    <m:den>
+                      <m:r>
+                        <m:rPr>
+                          <m:sty m:val="p"/>
+                        </m:rPr>
+                        <m:t>∂</m:t>
+                      </m:r>
+                      <m:r>
+                        <m:t>n</m:t>
+                      </m:r>
+                    </m:den>
+                  </m:f>
+                  <m:r>
+                    <m:rPr>
+                      <m:sty m:val="p"/>
+                    </m:rPr>
+                    <m:t>=</m:t>
+                  </m:r>
+                  <m:r>
+                    <m:t>h</m:t>
+                  </m:r>
+                  <m:r>
+                    <m:rPr>
+                      <m:sty m:val="p"/>
+                    </m:rPr>
+                    <m:t>(</m:t>
+                  </m:r>
+                  <m:r>
+                    <m:t>T</m:t>
+                  </m:r>
+                  <m:r>
+                    <m:rPr>
+                      <m:sty m:val="p"/>
+                    </m:rPr>
+                    <m:t>−</m:t>
+                  </m:r>
+                  <m:sSub>
+                    <m:e>
+                      <m:r>
+                        <m:t>T</m:t>
+                      </m:r>
+                    </m:e>
+                    <m:sub>
+                      <m:r>
+                        <m:rPr>
+                          <m:sty m:val="p"/>
+                        </m:rPr>
+                        <m:t>∞</m:t>
+                      </m:r>
+                    </m:sub>
+                  </m:sSub>
+                  <m:r>
+                    <m:rPr>
+                      <m:sty m:val="p"/>
+                    </m:rPr>
+                    <m:t>)</m:t>
+                  </m:r>
+                </m:oMath>
+              </m:oMathPara>
+            </a14:m>
+            <a:endParaRPr sz="1700" lang="ja-JP"/>
           </a:p>
         </p:txBody>
       </p:sp>

--- a/assets/figures/concepts/concept_diagrams_editable.pptx
+++ b/assets/figures/concepts/concept_diagrams_editable.pptx
@@ -8968,7 +8968,7 @@
                 </a:solidFill>
                 <a:latin typeface="Yu Gothic"/>
               </a:rPr>
-              <a:t>教材を研究の足場として使う</a:t>
+              <a:t>基礎学習から卒業研究へ進む</a:t>
             </a:r>
           </a:p>
         </p:txBody>
